--- a/Text/Japan_talkV1.pptx
+++ b/Text/Japan_talkV1.pptx
@@ -3836,8 +3836,8 @@
           </a:p>
         </p:txBody>
       </p:sp>
-      <mc:AlternateContent xmlns:mc="http://schemas.openxmlformats.org/markup-compatibility/2006" xmlns:a14="http://schemas.microsoft.com/office/drawing/2010/main">
-        <mc:Choice Requires="a14">
+      <mc:AlternateContent xmlns:mc="http://schemas.openxmlformats.org/markup-compatibility/2006">
+        <mc:Choice xmlns:a14="http://schemas.microsoft.com/office/drawing/2010/main" Requires="a14">
           <p:sp>
             <p:nvSpPr>
               <p:cNvPr id="17" name="TextBox 16">
@@ -3884,7 +3884,7 @@
                     <a:latin typeface="Times New Roman" panose="02020603050405020304" pitchFamily="18" charset="0"/>
                     <a:cs typeface="Times New Roman" panose="02020603050405020304" pitchFamily="18" charset="0"/>
                   </a:rPr>
-                  <a:t>Week 57: highest complexity + moderate entropy </a:t>
+                  <a:t>Week 56: highest complexity + moderate entropy </a:t>
                 </a:r>
               </a:p>
               <a:p>
@@ -3897,7 +3897,7 @@
                     <a:latin typeface="Times New Roman" panose="02020603050405020304" pitchFamily="18" charset="0"/>
                     <a:cs typeface="Times New Roman" panose="02020603050405020304" pitchFamily="18" charset="0"/>
                   </a:rPr>
-                  <a:t>Week 56: eruption week </a:t>
+                  <a:t>Week 57: eruption week </a:t>
                 </a:r>
               </a:p>
               <a:p>
@@ -3963,7 +3963,7 @@
             </p:txBody>
           </p:sp>
         </mc:Choice>
-        <mc:Fallback xmlns="">
+        <mc:Fallback>
           <p:sp>
             <p:nvSpPr>
               <p:cNvPr id="17" name="TextBox 16">

--- a/Text/Japan_talkV1.pptx
+++ b/Text/Japan_talkV1.pptx
@@ -113,6 +113,35 @@
     </p:ext>
   </p:extLst>
 </p:presentation>
+</file>
+
+<file path=ppt/changesInfos/changesInfo1.xml><?xml version="1.0" encoding="utf-8"?>
+<pc:chgInfo xmlns:a="http://schemas.openxmlformats.org/drawingml/2006/main" xmlns:r="http://schemas.openxmlformats.org/officeDocument/2006/relationships" xmlns:ac="http://schemas.microsoft.com/office/drawing/2013/main/command" xmlns:pc="http://schemas.microsoft.com/office/powerpoint/2013/main/command">
+  <pc:docChgLst>
+    <pc:chgData name="Alejandro Frery Orgambide" userId="589ee6cc-01ad-41fa-8fda-18ecb650abdd" providerId="ADAL" clId="{CF789C62-74E3-58EA-A715-8A5CAB20F6DF}"/>
+    <pc:docChg chg="modSld">
+      <pc:chgData name="Alejandro Frery Orgambide" userId="589ee6cc-01ad-41fa-8fda-18ecb650abdd" providerId="ADAL" clId="{CF789C62-74E3-58EA-A715-8A5CAB20F6DF}" dt="2026-07-29T23:26:33.199" v="0" actId="20577"/>
+      <pc:docMkLst>
+        <pc:docMk/>
+      </pc:docMkLst>
+      <pc:sldChg chg="modSp mod">
+        <pc:chgData name="Alejandro Frery Orgambide" userId="589ee6cc-01ad-41fa-8fda-18ecb650abdd" providerId="ADAL" clId="{CF789C62-74E3-58EA-A715-8A5CAB20F6DF}" dt="2026-07-29T23:26:33.199" v="0" actId="20577"/>
+        <pc:sldMkLst>
+          <pc:docMk/>
+          <pc:sldMk cId="122869872" sldId="259"/>
+        </pc:sldMkLst>
+        <pc:spChg chg="mod">
+          <ac:chgData name="Alejandro Frery Orgambide" userId="589ee6cc-01ad-41fa-8fda-18ecb650abdd" providerId="ADAL" clId="{CF789C62-74E3-58EA-A715-8A5CAB20F6DF}" dt="2026-07-29T23:26:33.199" v="0" actId="20577"/>
+          <ac:spMkLst>
+            <pc:docMk/>
+            <pc:sldMk cId="122869872" sldId="259"/>
+            <ac:spMk id="9" creationId="{708A510E-41F5-FA66-A562-D0BEFFD41F10}"/>
+          </ac:spMkLst>
+        </pc:spChg>
+      </pc:sldChg>
+    </pc:docChg>
+  </pc:docChgLst>
+</pc:chgInfo>
 </file>
 
 <file path=ppt/notesMasters/notesMaster1.xml><?xml version="1.0" encoding="utf-8"?>
@@ -3836,8 +3865,8 @@
           </a:p>
         </p:txBody>
       </p:sp>
-      <mc:AlternateContent xmlns:mc="http://schemas.openxmlformats.org/markup-compatibility/2006">
-        <mc:Choice xmlns:a14="http://schemas.microsoft.com/office/drawing/2010/main" Requires="a14">
+      <mc:AlternateContent xmlns:mc="http://schemas.openxmlformats.org/markup-compatibility/2006" xmlns:a14="http://schemas.microsoft.com/office/drawing/2010/main">
+        <mc:Choice Requires="a14">
           <p:sp>
             <p:nvSpPr>
               <p:cNvPr id="17" name="TextBox 16">
@@ -3963,7 +3992,7 @@
             </p:txBody>
           </p:sp>
         </mc:Choice>
-        <mc:Fallback>
+        <mc:Fallback xmlns="">
           <p:sp>
             <p:nvSpPr>
               <p:cNvPr id="17" name="TextBox 16">
@@ -4040,7 +4069,21 @@
                 <a:latin typeface="Times New Roman" panose="02020603050405020304" pitchFamily="18" charset="0"/>
                 <a:cs typeface="Times New Roman" panose="02020603050405020304" pitchFamily="18" charset="0"/>
               </a:rPr>
-              <a:t>Rasika Dilhani (Data Science PhD student, Alejandro C. Frery and Andrea Rey (supervisors)</a:t>
+              <a:t>Rasika Dilhani (Data Science </a:t>
+            </a:r>
+            <a:r>
+              <a:rPr lang="en-US" sz="1400" i="1">
+                <a:latin typeface="Times New Roman" panose="02020603050405020304" pitchFamily="18" charset="0"/>
+                <a:cs typeface="Times New Roman" panose="02020603050405020304" pitchFamily="18" charset="0"/>
+              </a:rPr>
+              <a:t>PhD student), </a:t>
+            </a:r>
+            <a:r>
+              <a:rPr lang="en-US" sz="1400" i="1" dirty="0">
+                <a:latin typeface="Times New Roman" panose="02020603050405020304" pitchFamily="18" charset="0"/>
+                <a:cs typeface="Times New Roman" panose="02020603050405020304" pitchFamily="18" charset="0"/>
+              </a:rPr>
+              <a:t>Alejandro C. Frery and Andrea Rey (supervisors)</a:t>
             </a:r>
             <a:endParaRPr lang="en-US" sz="1400" dirty="0">
               <a:latin typeface="Times New Roman" panose="02020603050405020304" pitchFamily="18" charset="0"/>
